--- a/doc/mechanism.pptx
+++ b/doc/mechanism.pptx
@@ -105,6 +105,11 @@
       </a:defRPr>
     </a:lvl9pPr>
   </p:defaultTextStyle>
+  <p:extLst>
+    <p:ext uri="{EFAFB233-063F-42B5-8137-9DF3F51BA10A}">
+      <p15:sldGuideLst xmlns:p15="http://schemas.microsoft.com/office/powerpoint/2012/main"/>
+    </p:ext>
+  </p:extLst>
 </p:presentation>
 </file>
 
@@ -257,7 +262,7 @@
           <a:p>
             <a:fld id="{D56B556E-1B6E-42F3-BF22-18CA0E3754ED}" type="datetimeFigureOut">
               <a:rPr kumimoji="1" lang="ja-JP" altLang="en-US" smtClean="0"/>
-              <a:t>2023/4/22</a:t>
+              <a:t>2026/3/5</a:t>
             </a:fld>
             <a:endParaRPr kumimoji="1" lang="ja-JP" altLang="en-US"/>
           </a:p>
@@ -457,7 +462,7 @@
           <a:p>
             <a:fld id="{D56B556E-1B6E-42F3-BF22-18CA0E3754ED}" type="datetimeFigureOut">
               <a:rPr kumimoji="1" lang="ja-JP" altLang="en-US" smtClean="0"/>
-              <a:t>2023/4/22</a:t>
+              <a:t>2026/3/5</a:t>
             </a:fld>
             <a:endParaRPr kumimoji="1" lang="ja-JP" altLang="en-US"/>
           </a:p>
@@ -667,7 +672,7 @@
           <a:p>
             <a:fld id="{D56B556E-1B6E-42F3-BF22-18CA0E3754ED}" type="datetimeFigureOut">
               <a:rPr kumimoji="1" lang="ja-JP" altLang="en-US" smtClean="0"/>
-              <a:t>2023/4/22</a:t>
+              <a:t>2026/3/5</a:t>
             </a:fld>
             <a:endParaRPr kumimoji="1" lang="ja-JP" altLang="en-US"/>
           </a:p>
@@ -867,7 +872,7 @@
           <a:p>
             <a:fld id="{D56B556E-1B6E-42F3-BF22-18CA0E3754ED}" type="datetimeFigureOut">
               <a:rPr kumimoji="1" lang="ja-JP" altLang="en-US" smtClean="0"/>
-              <a:t>2023/4/22</a:t>
+              <a:t>2026/3/5</a:t>
             </a:fld>
             <a:endParaRPr kumimoji="1" lang="ja-JP" altLang="en-US"/>
           </a:p>
@@ -1143,7 +1148,7 @@
           <a:p>
             <a:fld id="{D56B556E-1B6E-42F3-BF22-18CA0E3754ED}" type="datetimeFigureOut">
               <a:rPr kumimoji="1" lang="ja-JP" altLang="en-US" smtClean="0"/>
-              <a:t>2023/4/22</a:t>
+              <a:t>2026/3/5</a:t>
             </a:fld>
             <a:endParaRPr kumimoji="1" lang="ja-JP" altLang="en-US"/>
           </a:p>
@@ -1411,7 +1416,7 @@
           <a:p>
             <a:fld id="{D56B556E-1B6E-42F3-BF22-18CA0E3754ED}" type="datetimeFigureOut">
               <a:rPr kumimoji="1" lang="ja-JP" altLang="en-US" smtClean="0"/>
-              <a:t>2023/4/22</a:t>
+              <a:t>2026/3/5</a:t>
             </a:fld>
             <a:endParaRPr kumimoji="1" lang="ja-JP" altLang="en-US"/>
           </a:p>
@@ -1826,7 +1831,7 @@
           <a:p>
             <a:fld id="{D56B556E-1B6E-42F3-BF22-18CA0E3754ED}" type="datetimeFigureOut">
               <a:rPr kumimoji="1" lang="ja-JP" altLang="en-US" smtClean="0"/>
-              <a:t>2023/4/22</a:t>
+              <a:t>2026/3/5</a:t>
             </a:fld>
             <a:endParaRPr kumimoji="1" lang="ja-JP" altLang="en-US"/>
           </a:p>
@@ -1968,7 +1973,7 @@
           <a:p>
             <a:fld id="{D56B556E-1B6E-42F3-BF22-18CA0E3754ED}" type="datetimeFigureOut">
               <a:rPr kumimoji="1" lang="ja-JP" altLang="en-US" smtClean="0"/>
-              <a:t>2023/4/22</a:t>
+              <a:t>2026/3/5</a:t>
             </a:fld>
             <a:endParaRPr kumimoji="1" lang="ja-JP" altLang="en-US"/>
           </a:p>
@@ -2081,7 +2086,7 @@
           <a:p>
             <a:fld id="{D56B556E-1B6E-42F3-BF22-18CA0E3754ED}" type="datetimeFigureOut">
               <a:rPr kumimoji="1" lang="ja-JP" altLang="en-US" smtClean="0"/>
-              <a:t>2023/4/22</a:t>
+              <a:t>2026/3/5</a:t>
             </a:fld>
             <a:endParaRPr kumimoji="1" lang="ja-JP" altLang="en-US"/>
           </a:p>
@@ -2394,7 +2399,7 @@
           <a:p>
             <a:fld id="{D56B556E-1B6E-42F3-BF22-18CA0E3754ED}" type="datetimeFigureOut">
               <a:rPr kumimoji="1" lang="ja-JP" altLang="en-US" smtClean="0"/>
-              <a:t>2023/4/22</a:t>
+              <a:t>2026/3/5</a:t>
             </a:fld>
             <a:endParaRPr kumimoji="1" lang="ja-JP" altLang="en-US"/>
           </a:p>
@@ -2683,7 +2688,7 @@
           <a:p>
             <a:fld id="{D56B556E-1B6E-42F3-BF22-18CA0E3754ED}" type="datetimeFigureOut">
               <a:rPr kumimoji="1" lang="ja-JP" altLang="en-US" smtClean="0"/>
-              <a:t>2023/4/22</a:t>
+              <a:t>2026/3/5</a:t>
             </a:fld>
             <a:endParaRPr kumimoji="1" lang="ja-JP" altLang="en-US"/>
           </a:p>
@@ -2926,7 +2931,7 @@
           <a:p>
             <a:fld id="{D56B556E-1B6E-42F3-BF22-18CA0E3754ED}" type="datetimeFigureOut">
               <a:rPr kumimoji="1" lang="ja-JP" altLang="en-US" smtClean="0"/>
-              <a:t>2023/4/22</a:t>
+              <a:t>2026/3/5</a:t>
             </a:fld>
             <a:endParaRPr kumimoji="1" lang="ja-JP" altLang="en-US"/>
           </a:p>
@@ -4106,7 +4111,21 @@
                 <a:latin typeface="微软雅黑" panose="020B0503020204020204" pitchFamily="34" charset="-122"/>
                 <a:ea typeface="微软雅黑" panose="020B0503020204020204" pitchFamily="34" charset="-122"/>
               </a:rPr>
-              <a:t>https://app.henchat.net/henChatWC/?hash=</a:t>
+              <a:t>https://app.henchat.net/henChatWC/</a:t>
+            </a:r>
+            <a:r>
+              <a:rPr lang="en-US" altLang="zh-Hans" sz="1400" dirty="0">
+                <a:latin typeface="微软雅黑" panose="020B0503020204020204" pitchFamily="34" charset="-122"/>
+                <a:ea typeface="微软雅黑" panose="020B0503020204020204" pitchFamily="34" charset="-122"/>
+              </a:rPr>
+              <a:t>#</a:t>
+            </a:r>
+            <a:r>
+              <a:rPr lang="ja-JP" altLang="en-US" sz="1400" dirty="0">
+                <a:latin typeface="微软雅黑" panose="020B0503020204020204" pitchFamily="34" charset="-122"/>
+                <a:ea typeface="微软雅黑" panose="020B0503020204020204" pitchFamily="34" charset="-122"/>
+              </a:rPr>
+              <a:t>hash=</a:t>
             </a:r>
             <a:r>
               <a:rPr lang="en-US" altLang="ja-JP" sz="1400" dirty="0">
@@ -4150,7 +4169,7 @@
         </p:nvSpPr>
         <p:spPr>
           <a:xfrm>
-            <a:off x="7663543" y="841548"/>
+            <a:off x="7690213" y="841548"/>
             <a:ext cx="326571" cy="307777"/>
           </a:xfrm>
           <a:prstGeom prst="rect">
@@ -4202,7 +4221,7 @@
         </p:nvSpPr>
         <p:spPr>
           <a:xfrm>
-            <a:off x="8519886" y="841547"/>
+            <a:off x="8546556" y="841547"/>
             <a:ext cx="326571" cy="307777"/>
           </a:xfrm>
           <a:prstGeom prst="rect">
@@ -4258,7 +4277,7 @@
         <p:spPr>
           <a:xfrm flipV="1">
             <a:off x="3128681" y="1149324"/>
-            <a:ext cx="5554491" cy="800497"/>
+            <a:ext cx="5581161" cy="800497"/>
           </a:xfrm>
           <a:prstGeom prst="bentConnector2">
             <a:avLst/>
@@ -4304,7 +4323,7 @@
         <p:spPr>
           <a:xfrm flipV="1">
             <a:off x="5511052" y="1149325"/>
-            <a:ext cx="2315777" cy="2094374"/>
+            <a:ext cx="2342447" cy="2094374"/>
           </a:xfrm>
           <a:prstGeom prst="bentConnector2">
             <a:avLst/>
@@ -5184,7 +5203,21 @@
                 <a:latin typeface="微软雅黑" panose="020B0503020204020204" pitchFamily="34" charset="-122"/>
                 <a:ea typeface="微软雅黑" panose="020B0503020204020204" pitchFamily="34" charset="-122"/>
               </a:rPr>
-              <a:t>https://app.henchat.net/henChatWC/?hash=</a:t>
+              <a:t>https://app.henchat.net/henChatWC/</a:t>
+            </a:r>
+            <a:r>
+              <a:rPr lang="en-US" altLang="zh-Hans" sz="1400" dirty="0">
+                <a:latin typeface="微软雅黑" panose="020B0503020204020204" pitchFamily="34" charset="-122"/>
+                <a:ea typeface="微软雅黑" panose="020B0503020204020204" pitchFamily="34" charset="-122"/>
+              </a:rPr>
+              <a:t>#</a:t>
+            </a:r>
+            <a:r>
+              <a:rPr lang="ja-JP" altLang="en-US" sz="1400" dirty="0">
+                <a:latin typeface="微软雅黑" panose="020B0503020204020204" pitchFamily="34" charset="-122"/>
+                <a:ea typeface="微软雅黑" panose="020B0503020204020204" pitchFamily="34" charset="-122"/>
+              </a:rPr>
+              <a:t>hash=</a:t>
             </a:r>
             <a:r>
               <a:rPr lang="en-US" altLang="ja-JP" sz="1400" dirty="0">
@@ -5228,7 +5261,7 @@
         </p:nvSpPr>
         <p:spPr>
           <a:xfrm>
-            <a:off x="7663543" y="841548"/>
+            <a:off x="7690213" y="841548"/>
             <a:ext cx="326571" cy="307777"/>
           </a:xfrm>
           <a:prstGeom prst="rect">
@@ -5280,7 +5313,7 @@
         </p:nvSpPr>
         <p:spPr>
           <a:xfrm>
-            <a:off x="8519886" y="841547"/>
+            <a:off x="8546556" y="841547"/>
             <a:ext cx="326571" cy="307777"/>
           </a:xfrm>
           <a:prstGeom prst="rect">
@@ -5607,8 +5640,8 @@
         </p:nvCxnSpPr>
         <p:spPr>
           <a:xfrm rot="5400000">
-            <a:off x="7812613" y="1472183"/>
-            <a:ext cx="1193419" cy="547700"/>
+            <a:off x="7825948" y="1458848"/>
+            <a:ext cx="1193419" cy="574370"/>
           </a:xfrm>
           <a:prstGeom prst="bentConnector2">
             <a:avLst/>
@@ -5724,13 +5757,13 @@
         </p:nvCxnSpPr>
         <p:spPr>
           <a:xfrm rot="5400000">
-            <a:off x="7039695" y="1088973"/>
-            <a:ext cx="726782" cy="847487"/>
+            <a:off x="7053030" y="1075638"/>
+            <a:ext cx="726782" cy="874157"/>
           </a:xfrm>
           <a:prstGeom prst="bentConnector4">
             <a:avLst>
               <a:gd name="adj1" fmla="val 36817"/>
-              <a:gd name="adj2" fmla="val 126974"/>
+              <a:gd name="adj2" fmla="val 126151"/>
             </a:avLst>
           </a:prstGeom>
           <a:ln>
